--- a/SST_Complete_Course_SagarSir/02_History_इतिहास/Class_11_History_Grand_Marathon.pptx
+++ b/SST_Complete_Course_SagarSir/02_History_इतिहास/Class_11_History_Grand_Marathon.pptx
@@ -3394,7 +3394,7 @@
               </a:defRPr>
             </a:pPr>
             <a:r>
-              <a:t>मार्गदर्शक: श्रवण कुमार 'सागर' (Sagar Sir)  |  Helpline: +91 91101 13671  |  sagarcoaching.tech</a:t>
+              <a:t>मार्गदर्शक: श्रवण कुमार 'सागर' (Sagar Sir)  |  sagarcoaching.tech</a:t>
             </a:r>
           </a:p>
         </p:txBody>
@@ -3585,7 +3585,7 @@
               </a:defRPr>
             </a:pPr>
             <a:r>
-              <a:t>WhatsApp / Helpline: +91 91101 13671  |  Official Website: sagarcoaching.tech  |  Slide 10 of 64</a:t>
+              <a:t>Official Website: sagarcoaching.tech  |  Slide 10 of 64</a:t>
             </a:r>
           </a:p>
         </p:txBody>
@@ -4051,7 +4051,7 @@
               </a:defRPr>
             </a:pPr>
             <a:r>
-              <a:t>WhatsApp / Helpline: +91 91101 13671  |  Official Website: sagarcoaching.tech  |  Slide 11 of 64</a:t>
+              <a:t>Official Website: sagarcoaching.tech  |  Slide 11 of 64</a:t>
             </a:r>
           </a:p>
         </p:txBody>
@@ -4585,7 +4585,7 @@
               </a:defRPr>
             </a:pPr>
             <a:r>
-              <a:t>WhatsApp / Helpline: +91 91101 13671  |  Official Website: sagarcoaching.tech  |  Slide 12 of 64</a:t>
+              <a:t>Official Website: sagarcoaching.tech  |  Slide 12 of 64</a:t>
             </a:r>
           </a:p>
         </p:txBody>
@@ -5051,7 +5051,7 @@
               </a:defRPr>
             </a:pPr>
             <a:r>
-              <a:t>WhatsApp / Helpline: +91 91101 13671  |  Official Website: sagarcoaching.tech  |  Slide 13 of 64</a:t>
+              <a:t>Official Website: sagarcoaching.tech  |  Slide 13 of 64</a:t>
             </a:r>
           </a:p>
         </p:txBody>
@@ -5585,7 +5585,7 @@
               </a:defRPr>
             </a:pPr>
             <a:r>
-              <a:t>WhatsApp / Helpline: +91 91101 13671  |  Official Website: sagarcoaching.tech  |  Slide 14 of 64</a:t>
+              <a:t>Official Website: sagarcoaching.tech  |  Slide 14 of 64</a:t>
             </a:r>
           </a:p>
         </p:txBody>
@@ -6051,7 +6051,7 @@
               </a:defRPr>
             </a:pPr>
             <a:r>
-              <a:t>WhatsApp / Helpline: +91 91101 13671  |  Official Website: sagarcoaching.tech  |  Slide 15 of 64</a:t>
+              <a:t>Official Website: sagarcoaching.tech  |  Slide 15 of 64</a:t>
             </a:r>
           </a:p>
         </p:txBody>
@@ -6585,7 +6585,7 @@
               </a:defRPr>
             </a:pPr>
             <a:r>
-              <a:t>WhatsApp / Helpline: +91 91101 13671  |  Official Website: sagarcoaching.tech  |  Slide 16 of 64</a:t>
+              <a:t>Official Website: sagarcoaching.tech  |  Slide 16 of 64</a:t>
             </a:r>
           </a:p>
         </p:txBody>
@@ -7051,7 +7051,7 @@
               </a:defRPr>
             </a:pPr>
             <a:r>
-              <a:t>WhatsApp / Helpline: +91 91101 13671  |  Official Website: sagarcoaching.tech  |  Slide 17 of 64</a:t>
+              <a:t>Official Website: sagarcoaching.tech  |  Slide 17 of 64</a:t>
             </a:r>
           </a:p>
         </p:txBody>
@@ -7585,7 +7585,7 @@
               </a:defRPr>
             </a:pPr>
             <a:r>
-              <a:t>WhatsApp / Helpline: +91 91101 13671  |  Official Website: sagarcoaching.tech  |  Slide 18 of 64</a:t>
+              <a:t>Official Website: sagarcoaching.tech  |  Slide 18 of 64</a:t>
             </a:r>
           </a:p>
         </p:txBody>
@@ -8051,7 +8051,7 @@
               </a:defRPr>
             </a:pPr>
             <a:r>
-              <a:t>WhatsApp / Helpline: +91 91101 13671  |  Official Website: sagarcoaching.tech  |  Slide 19 of 64</a:t>
+              <a:t>Official Website: sagarcoaching.tech  |  Slide 19 of 64</a:t>
             </a:r>
           </a:p>
         </p:txBody>
@@ -8585,7 +8585,7 @@
               </a:defRPr>
             </a:pPr>
             <a:r>
-              <a:t>WhatsApp / Helpline: +91 91101 13671  |  Official Website: sagarcoaching.tech  |  Slide 2 of 64</a:t>
+              <a:t>Official Website: sagarcoaching.tech  |  Slide 2 of 64</a:t>
             </a:r>
           </a:p>
         </p:txBody>
@@ -9051,7 +9051,7 @@
               </a:defRPr>
             </a:pPr>
             <a:r>
-              <a:t>WhatsApp / Helpline: +91 91101 13671  |  Official Website: sagarcoaching.tech  |  Slide 20 of 64</a:t>
+              <a:t>Official Website: sagarcoaching.tech  |  Slide 20 of 64</a:t>
             </a:r>
           </a:p>
         </p:txBody>
@@ -9517,7 +9517,7 @@
               </a:defRPr>
             </a:pPr>
             <a:r>
-              <a:t>WhatsApp / Helpline: +91 91101 13671  |  Official Website: sagarcoaching.tech  |  Slide 21 of 64</a:t>
+              <a:t>Official Website: sagarcoaching.tech  |  Slide 21 of 64</a:t>
             </a:r>
           </a:p>
         </p:txBody>
@@ -10051,7 +10051,7 @@
               </a:defRPr>
             </a:pPr>
             <a:r>
-              <a:t>WhatsApp / Helpline: +91 91101 13671  |  Official Website: sagarcoaching.tech  |  Slide 22 of 64</a:t>
+              <a:t>Official Website: sagarcoaching.tech  |  Slide 22 of 64</a:t>
             </a:r>
           </a:p>
         </p:txBody>
@@ -10517,7 +10517,7 @@
               </a:defRPr>
             </a:pPr>
             <a:r>
-              <a:t>WhatsApp / Helpline: +91 91101 13671  |  Official Website: sagarcoaching.tech  |  Slide 23 of 64</a:t>
+              <a:t>Official Website: sagarcoaching.tech  |  Slide 23 of 64</a:t>
             </a:r>
           </a:p>
         </p:txBody>
@@ -11051,7 +11051,7 @@
               </a:defRPr>
             </a:pPr>
             <a:r>
-              <a:t>WhatsApp / Helpline: +91 91101 13671  |  Official Website: sagarcoaching.tech  |  Slide 24 of 64</a:t>
+              <a:t>Official Website: sagarcoaching.tech  |  Slide 24 of 64</a:t>
             </a:r>
           </a:p>
         </p:txBody>
@@ -11517,7 +11517,7 @@
               </a:defRPr>
             </a:pPr>
             <a:r>
-              <a:t>WhatsApp / Helpline: +91 91101 13671  |  Official Website: sagarcoaching.tech  |  Slide 25 of 64</a:t>
+              <a:t>Official Website: sagarcoaching.tech  |  Slide 25 of 64</a:t>
             </a:r>
           </a:p>
         </p:txBody>
@@ -12051,7 +12051,7 @@
               </a:defRPr>
             </a:pPr>
             <a:r>
-              <a:t>WhatsApp / Helpline: +91 91101 13671  |  Official Website: sagarcoaching.tech  |  Slide 26 of 64</a:t>
+              <a:t>Official Website: sagarcoaching.tech  |  Slide 26 of 64</a:t>
             </a:r>
           </a:p>
         </p:txBody>
@@ -12517,7 +12517,7 @@
               </a:defRPr>
             </a:pPr>
             <a:r>
-              <a:t>WhatsApp / Helpline: +91 91101 13671  |  Official Website: sagarcoaching.tech  |  Slide 27 of 64</a:t>
+              <a:t>Official Website: sagarcoaching.tech  |  Slide 27 of 64</a:t>
             </a:r>
           </a:p>
         </p:txBody>
@@ -13051,7 +13051,7 @@
               </a:defRPr>
             </a:pPr>
             <a:r>
-              <a:t>WhatsApp / Helpline: +91 91101 13671  |  Official Website: sagarcoaching.tech  |  Slide 28 of 64</a:t>
+              <a:t>Official Website: sagarcoaching.tech  |  Slide 28 of 64</a:t>
             </a:r>
           </a:p>
         </p:txBody>
@@ -13517,7 +13517,7 @@
               </a:defRPr>
             </a:pPr>
             <a:r>
-              <a:t>WhatsApp / Helpline: +91 91101 13671  |  Official Website: sagarcoaching.tech  |  Slide 29 of 64</a:t>
+              <a:t>Official Website: sagarcoaching.tech  |  Slide 29 of 64</a:t>
             </a:r>
           </a:p>
         </p:txBody>
@@ -14051,7 +14051,7 @@
               </a:defRPr>
             </a:pPr>
             <a:r>
-              <a:t>WhatsApp / Helpline: +91 91101 13671  |  Official Website: sagarcoaching.tech  |  Slide 3 of 64</a:t>
+              <a:t>Official Website: sagarcoaching.tech  |  Slide 3 of 64</a:t>
             </a:r>
           </a:p>
         </p:txBody>
@@ -14585,7 +14585,7 @@
               </a:defRPr>
             </a:pPr>
             <a:r>
-              <a:t>WhatsApp / Helpline: +91 91101 13671  |  Official Website: sagarcoaching.tech  |  Slide 30 of 64</a:t>
+              <a:t>Official Website: sagarcoaching.tech  |  Slide 30 of 64</a:t>
             </a:r>
           </a:p>
         </p:txBody>
@@ -15051,7 +15051,7 @@
               </a:defRPr>
             </a:pPr>
             <a:r>
-              <a:t>WhatsApp / Helpline: +91 91101 13671  |  Official Website: sagarcoaching.tech  |  Slide 31 of 64</a:t>
+              <a:t>Official Website: sagarcoaching.tech  |  Slide 31 of 64</a:t>
             </a:r>
           </a:p>
         </p:txBody>
@@ -15585,7 +15585,7 @@
               </a:defRPr>
             </a:pPr>
             <a:r>
-              <a:t>WhatsApp / Helpline: +91 91101 13671  |  Official Website: sagarcoaching.tech  |  Slide 32 of 64</a:t>
+              <a:t>Official Website: sagarcoaching.tech  |  Slide 32 of 64</a:t>
             </a:r>
           </a:p>
         </p:txBody>
@@ -16051,7 +16051,7 @@
               </a:defRPr>
             </a:pPr>
             <a:r>
-              <a:t>WhatsApp / Helpline: +91 91101 13671  |  Official Website: sagarcoaching.tech  |  Slide 33 of 64</a:t>
+              <a:t>Official Website: sagarcoaching.tech  |  Slide 33 of 64</a:t>
             </a:r>
           </a:p>
         </p:txBody>
@@ -16585,7 +16585,7 @@
               </a:defRPr>
             </a:pPr>
             <a:r>
-              <a:t>WhatsApp / Helpline: +91 91101 13671  |  Official Website: sagarcoaching.tech  |  Slide 34 of 64</a:t>
+              <a:t>Official Website: sagarcoaching.tech  |  Slide 34 of 64</a:t>
             </a:r>
           </a:p>
         </p:txBody>
@@ -17051,7 +17051,7 @@
               </a:defRPr>
             </a:pPr>
             <a:r>
-              <a:t>WhatsApp / Helpline: +91 91101 13671  |  Official Website: sagarcoaching.tech  |  Slide 35 of 64</a:t>
+              <a:t>Official Website: sagarcoaching.tech  |  Slide 35 of 64</a:t>
             </a:r>
           </a:p>
         </p:txBody>
@@ -17585,7 +17585,7 @@
               </a:defRPr>
             </a:pPr>
             <a:r>
-              <a:t>WhatsApp / Helpline: +91 91101 13671  |  Official Website: sagarcoaching.tech  |  Slide 36 of 64</a:t>
+              <a:t>Official Website: sagarcoaching.tech  |  Slide 36 of 64</a:t>
             </a:r>
           </a:p>
         </p:txBody>
@@ -18051,7 +18051,7 @@
               </a:defRPr>
             </a:pPr>
             <a:r>
-              <a:t>WhatsApp / Helpline: +91 91101 13671  |  Official Website: sagarcoaching.tech  |  Slide 37 of 64</a:t>
+              <a:t>Official Website: sagarcoaching.tech  |  Slide 37 of 64</a:t>
             </a:r>
           </a:p>
         </p:txBody>
@@ -18585,7 +18585,7 @@
               </a:defRPr>
             </a:pPr>
             <a:r>
-              <a:t>WhatsApp / Helpline: +91 91101 13671  |  Official Website: sagarcoaching.tech  |  Slide 38 of 64</a:t>
+              <a:t>Official Website: sagarcoaching.tech  |  Slide 38 of 64</a:t>
             </a:r>
           </a:p>
         </p:txBody>
@@ -19051,7 +19051,7 @@
               </a:defRPr>
             </a:pPr>
             <a:r>
-              <a:t>WhatsApp / Helpline: +91 91101 13671  |  Official Website: sagarcoaching.tech  |  Slide 39 of 64</a:t>
+              <a:t>Official Website: sagarcoaching.tech  |  Slide 39 of 64</a:t>
             </a:r>
           </a:p>
         </p:txBody>
@@ -19585,7 +19585,7 @@
               </a:defRPr>
             </a:pPr>
             <a:r>
-              <a:t>WhatsApp / Helpline: +91 91101 13671  |  Official Website: sagarcoaching.tech  |  Slide 4 of 64</a:t>
+              <a:t>Official Website: sagarcoaching.tech  |  Slide 4 of 64</a:t>
             </a:r>
           </a:p>
         </p:txBody>
@@ -20051,7 +20051,7 @@
               </a:defRPr>
             </a:pPr>
             <a:r>
-              <a:t>WhatsApp / Helpline: +91 91101 13671  |  Official Website: sagarcoaching.tech  |  Slide 40 of 64</a:t>
+              <a:t>Official Website: sagarcoaching.tech  |  Slide 40 of 64</a:t>
             </a:r>
           </a:p>
         </p:txBody>
@@ -20517,7 +20517,7 @@
               </a:defRPr>
             </a:pPr>
             <a:r>
-              <a:t>WhatsApp / Helpline: +91 91101 13671  |  Official Website: sagarcoaching.tech  |  Slide 41 of 64</a:t>
+              <a:t>Official Website: sagarcoaching.tech  |  Slide 41 of 64</a:t>
             </a:r>
           </a:p>
         </p:txBody>
@@ -21051,7 +21051,7 @@
               </a:defRPr>
             </a:pPr>
             <a:r>
-              <a:t>WhatsApp / Helpline: +91 91101 13671  |  Official Website: sagarcoaching.tech  |  Slide 42 of 64</a:t>
+              <a:t>Official Website: sagarcoaching.tech  |  Slide 42 of 64</a:t>
             </a:r>
           </a:p>
         </p:txBody>
@@ -21517,7 +21517,7 @@
               </a:defRPr>
             </a:pPr>
             <a:r>
-              <a:t>WhatsApp / Helpline: +91 91101 13671  |  Official Website: sagarcoaching.tech  |  Slide 43 of 64</a:t>
+              <a:t>Official Website: sagarcoaching.tech  |  Slide 43 of 64</a:t>
             </a:r>
           </a:p>
         </p:txBody>
@@ -22051,7 +22051,7 @@
               </a:defRPr>
             </a:pPr>
             <a:r>
-              <a:t>WhatsApp / Helpline: +91 91101 13671  |  Official Website: sagarcoaching.tech  |  Slide 44 of 64</a:t>
+              <a:t>Official Website: sagarcoaching.tech  |  Slide 44 of 64</a:t>
             </a:r>
           </a:p>
         </p:txBody>
@@ -22517,7 +22517,7 @@
               </a:defRPr>
             </a:pPr>
             <a:r>
-              <a:t>WhatsApp / Helpline: +91 91101 13671  |  Official Website: sagarcoaching.tech  |  Slide 45 of 64</a:t>
+              <a:t>Official Website: sagarcoaching.tech  |  Slide 45 of 64</a:t>
             </a:r>
           </a:p>
         </p:txBody>
@@ -23051,7 +23051,7 @@
               </a:defRPr>
             </a:pPr>
             <a:r>
-              <a:t>WhatsApp / Helpline: +91 91101 13671  |  Official Website: sagarcoaching.tech  |  Slide 46 of 64</a:t>
+              <a:t>Official Website: sagarcoaching.tech  |  Slide 46 of 64</a:t>
             </a:r>
           </a:p>
         </p:txBody>
@@ -23517,7 +23517,7 @@
               </a:defRPr>
             </a:pPr>
             <a:r>
-              <a:t>WhatsApp / Helpline: +91 91101 13671  |  Official Website: sagarcoaching.tech  |  Slide 47 of 64</a:t>
+              <a:t>Official Website: sagarcoaching.tech  |  Slide 47 of 64</a:t>
             </a:r>
           </a:p>
         </p:txBody>
@@ -24051,7 +24051,7 @@
               </a:defRPr>
             </a:pPr>
             <a:r>
-              <a:t>WhatsApp / Helpline: +91 91101 13671  |  Official Website: sagarcoaching.tech  |  Slide 48 of 64</a:t>
+              <a:t>Official Website: sagarcoaching.tech  |  Slide 48 of 64</a:t>
             </a:r>
           </a:p>
         </p:txBody>
@@ -24517,7 +24517,7 @@
               </a:defRPr>
             </a:pPr>
             <a:r>
-              <a:t>WhatsApp / Helpline: +91 91101 13671  |  Official Website: sagarcoaching.tech  |  Slide 49 of 64</a:t>
+              <a:t>Official Website: sagarcoaching.tech  |  Slide 49 of 64</a:t>
             </a:r>
           </a:p>
         </p:txBody>
@@ -25051,7 +25051,7 @@
               </a:defRPr>
             </a:pPr>
             <a:r>
-              <a:t>WhatsApp / Helpline: +91 91101 13671  |  Official Website: sagarcoaching.tech  |  Slide 5 of 64</a:t>
+              <a:t>Official Website: sagarcoaching.tech  |  Slide 5 of 64</a:t>
             </a:r>
           </a:p>
         </p:txBody>
@@ -25585,7 +25585,7 @@
               </a:defRPr>
             </a:pPr>
             <a:r>
-              <a:t>WhatsApp / Helpline: +91 91101 13671  |  Official Website: sagarcoaching.tech  |  Slide 50 of 64</a:t>
+              <a:t>Official Website: sagarcoaching.tech  |  Slide 50 of 64</a:t>
             </a:r>
           </a:p>
         </p:txBody>
@@ -26051,7 +26051,7 @@
               </a:defRPr>
             </a:pPr>
             <a:r>
-              <a:t>WhatsApp / Helpline: +91 91101 13671  |  Official Website: sagarcoaching.tech  |  Slide 51 of 64</a:t>
+              <a:t>Official Website: sagarcoaching.tech  |  Slide 51 of 64</a:t>
             </a:r>
           </a:p>
         </p:txBody>
@@ -26585,7 +26585,7 @@
               </a:defRPr>
             </a:pPr>
             <a:r>
-              <a:t>WhatsApp / Helpline: +91 91101 13671  |  Official Website: sagarcoaching.tech  |  Slide 52 of 64</a:t>
+              <a:t>Official Website: sagarcoaching.tech  |  Slide 52 of 64</a:t>
             </a:r>
           </a:p>
         </p:txBody>
@@ -27051,7 +27051,7 @@
               </a:defRPr>
             </a:pPr>
             <a:r>
-              <a:t>WhatsApp / Helpline: +91 91101 13671  |  Official Website: sagarcoaching.tech  |  Slide 53 of 64</a:t>
+              <a:t>Official Website: sagarcoaching.tech  |  Slide 53 of 64</a:t>
             </a:r>
           </a:p>
         </p:txBody>
@@ -27585,7 +27585,7 @@
               </a:defRPr>
             </a:pPr>
             <a:r>
-              <a:t>WhatsApp / Helpline: +91 91101 13671  |  Official Website: sagarcoaching.tech  |  Slide 54 of 64</a:t>
+              <a:t>Official Website: sagarcoaching.tech  |  Slide 54 of 64</a:t>
             </a:r>
           </a:p>
         </p:txBody>
@@ -28051,7 +28051,7 @@
               </a:defRPr>
             </a:pPr>
             <a:r>
-              <a:t>WhatsApp / Helpline: +91 91101 13671  |  Official Website: sagarcoaching.tech  |  Slide 55 of 64</a:t>
+              <a:t>Official Website: sagarcoaching.tech  |  Slide 55 of 64</a:t>
             </a:r>
           </a:p>
         </p:txBody>
@@ -28585,7 +28585,7 @@
               </a:defRPr>
             </a:pPr>
             <a:r>
-              <a:t>WhatsApp / Helpline: +91 91101 13671  |  Official Website: sagarcoaching.tech  |  Slide 56 of 64</a:t>
+              <a:t>Official Website: sagarcoaching.tech  |  Slide 56 of 64</a:t>
             </a:r>
           </a:p>
         </p:txBody>
@@ -29051,7 +29051,7 @@
               </a:defRPr>
             </a:pPr>
             <a:r>
-              <a:t>WhatsApp / Helpline: +91 91101 13671  |  Official Website: sagarcoaching.tech  |  Slide 57 of 64</a:t>
+              <a:t>Official Website: sagarcoaching.tech  |  Slide 57 of 64</a:t>
             </a:r>
           </a:p>
         </p:txBody>
@@ -29585,7 +29585,7 @@
               </a:defRPr>
             </a:pPr>
             <a:r>
-              <a:t>WhatsApp / Helpline: +91 91101 13671  |  Official Website: sagarcoaching.tech  |  Slide 58 of 64</a:t>
+              <a:t>Official Website: sagarcoaching.tech  |  Slide 58 of 64</a:t>
             </a:r>
           </a:p>
         </p:txBody>
@@ -30051,7 +30051,7 @@
               </a:defRPr>
             </a:pPr>
             <a:r>
-              <a:t>WhatsApp / Helpline: +91 91101 13671  |  Official Website: sagarcoaching.tech  |  Slide 59 of 64</a:t>
+              <a:t>Official Website: sagarcoaching.tech  |  Slide 59 of 64</a:t>
             </a:r>
           </a:p>
         </p:txBody>
@@ -30585,7 +30585,7 @@
               </a:defRPr>
             </a:pPr>
             <a:r>
-              <a:t>WhatsApp / Helpline: +91 91101 13671  |  Official Website: sagarcoaching.tech  |  Slide 6 of 64</a:t>
+              <a:t>Official Website: sagarcoaching.tech  |  Slide 6 of 64</a:t>
             </a:r>
           </a:p>
         </p:txBody>
@@ -31051,7 +31051,7 @@
               </a:defRPr>
             </a:pPr>
             <a:r>
-              <a:t>WhatsApp / Helpline: +91 91101 13671  |  Official Website: sagarcoaching.tech  |  Slide 60 of 64</a:t>
+              <a:t>Official Website: sagarcoaching.tech  |  Slide 60 of 64</a:t>
             </a:r>
           </a:p>
         </p:txBody>
@@ -31517,7 +31517,7 @@
               </a:defRPr>
             </a:pPr>
             <a:r>
-              <a:t>WhatsApp / Helpline: +91 91101 13671  |  Official Website: sagarcoaching.tech  |  Slide 61 of 64</a:t>
+              <a:t>Official Website: sagarcoaching.tech  |  Slide 61 of 64</a:t>
             </a:r>
           </a:p>
         </p:txBody>
@@ -32051,7 +32051,7 @@
               </a:defRPr>
             </a:pPr>
             <a:r>
-              <a:t>WhatsApp / Helpline: +91 91101 13671  |  Official Website: sagarcoaching.tech  |  Slide 62 of 64</a:t>
+              <a:t>Official Website: sagarcoaching.tech  |  Slide 62 of 64</a:t>
             </a:r>
           </a:p>
         </p:txBody>
@@ -32377,7 +32377,7 @@
               </a:defRPr>
             </a:pPr>
             <a:r>
-              <a:t>WhatsApp / Helpline: +91 91101 13671  |  Official Website: sagarcoaching.tech  |  Slide 63 of 64</a:t>
+              <a:t>Official Website: sagarcoaching.tech  |  Slide 63 of 64</a:t>
             </a:r>
           </a:p>
         </p:txBody>
@@ -32642,7 +32642,7 @@
               </a:defRPr>
             </a:pPr>
             <a:r>
-              <a:t>इस क्लास की PDF डाउनलोड करें: sagarcoaching.tech | Helpline: +91 91101 13671</a:t>
+              <a:t>इस क्लास की PDF डाउनलोड करें: sagarcoaching.tech</a:t>
             </a:r>
           </a:p>
         </p:txBody>
@@ -32746,7 +32746,7 @@
               </a:defRPr>
             </a:pPr>
             <a:r>
-              <a:t>मार्गदर्शक: श्रवण कुमार 'सागर' (Sagar Sir)  |  Helpline: +91 91101 13671  |  sagarcoaching.tech</a:t>
+              <a:t>मार्गदर्शक: श्रवण कुमार 'सागर' (Sagar Sir)  |  sagarcoaching.tech</a:t>
             </a:r>
           </a:p>
         </p:txBody>
@@ -32937,7 +32937,7 @@
               </a:defRPr>
             </a:pPr>
             <a:r>
-              <a:t>WhatsApp / Helpline: +91 91101 13671  |  Official Website: sagarcoaching.tech  |  Slide 7 of 64</a:t>
+              <a:t>Official Website: sagarcoaching.tech  |  Slide 7 of 64</a:t>
             </a:r>
           </a:p>
         </p:txBody>
@@ -33471,7 +33471,7 @@
               </a:defRPr>
             </a:pPr>
             <a:r>
-              <a:t>WhatsApp / Helpline: +91 91101 13671  |  Official Website: sagarcoaching.tech  |  Slide 8 of 64</a:t>
+              <a:t>Official Website: sagarcoaching.tech  |  Slide 8 of 64</a:t>
             </a:r>
           </a:p>
         </p:txBody>
@@ -33937,7 +33937,7 @@
               </a:defRPr>
             </a:pPr>
             <a:r>
-              <a:t>WhatsApp / Helpline: +91 91101 13671  |  Official Website: sagarcoaching.tech  |  Slide 9 of 64</a:t>
+              <a:t>Official Website: sagarcoaching.tech  |  Slide 9 of 64</a:t>
             </a:r>
           </a:p>
         </p:txBody>
